--- a/dist/초5/사회·역사/역사와생활/초5_사회·역사_역사와생활_01_선사시대와고조선.pptx
+++ b/dist/초5/사회·역사/역사와생활/초5_사회·역사_역사와생활_01_선사시대와고조선.pptx
@@ -121,13 +121,13 @@
   <p:extLst>
     <p:ext uri="{521415D9-36F7-43E2-AB2F-B90AF26B5E84}">
       <p14:sectionLst xmlns:p14="http://schemas.microsoft.com/office/powerpoint/2010/main">
-        <p14:section name="도입" id="{32cc2995-2ff1-ce02-e340-ee264516ff47}">
+        <p14:section name="도입" id="{8e4bbc7b-913e-06bb-f61e-f79152a7491e}">
           <p14:sldIdLst>
             <p14:sldId id="256"/>
             <p14:sldId id="257"/>
           </p14:sldIdLst>
         </p14:section>
-        <p14:section name="개념" id="{614cc198-b08c-5512-f279-72fc7194fcda}">
+        <p14:section name="개념" id="{683f841e-474f-6115-329a-19635509c462}">
           <p14:sldIdLst>
             <p14:sldId id="258"/>
             <p14:sldId id="259"/>
@@ -136,7 +136,7 @@
             <p14:sldId id="265"/>
           </p14:sldIdLst>
         </p14:section>
-        <p14:section name="연습" id="{b951b6b6-ff64-359b-cacc-0a4f282ab0d1}">
+        <p14:section name="연습" id="{89267994-7490-8a64-9f6e-b8162f646c46}">
           <p14:sldIdLst>
             <p14:sldId id="261"/>
             <p14:sldId id="262"/>
@@ -144,24 +144,24 @@
             <p14:sldId id="266"/>
           </p14:sldIdLst>
         </p14:section>
-        <p14:section name="개념" id="{ed215c1c-2579-5500-c89f-af4b3f36a65e}">
+        <p14:section name="개념" id="{0ad9676f-8211-3921-c79f-d6c8b961d21c}">
           <p14:sldIdLst/>
         </p14:section>
-        <p14:section name="연습" id="{b11d57a2-af8d-0eb5-9de6-08e4be768b3d}">
+        <p14:section name="연습" id="{3488ddbd-577f-7f45-9494-7b453aecaae5}">
           <p14:sldIdLst/>
         </p14:section>
-        <p14:section name="확인" id="{da757e93-4637-8386-e3ad-47a4d734ad8c}">
+        <p14:section name="확인" id="{b1be171a-4a55-d522-6e9e-52d88415c13f}">
           <p14:sldIdLst>
             <p14:sldId id="267"/>
             <p14:sldId id="268"/>
           </p14:sldIdLst>
         </p14:section>
-        <p14:section name="정리" id="{0484eed0-defe-42bd-a1ea-029d1aecce90}">
+        <p14:section name="정리" id="{9b6ccc10-2ebe-4507-7b8b-0cbc16945bcf}">
           <p14:sldIdLst>
             <p14:sldId id="269"/>
           </p14:sldIdLst>
         </p14:section>
-        <p14:section name="보충" id="{0b0c1c9a-ca64-48f9-48f9-0353099e0413}">
+        <p14:section name="보충" id="{d509a204-2da2-36b7-6695-d0f04e265616}">
           <p14:sldIdLst>
             <p14:sldId id="270"/>
           </p14:sldIdLst>

--- a/dist/초5/사회·역사/역사와생활/초5_사회·역사_역사와생활_01_선사시대와고조선.pptx
+++ b/dist/초5/사회·역사/역사와생활/초5_사회·역사_역사와생활_01_선사시대와고조선.pptx
@@ -121,13 +121,13 @@
   <p:extLst>
     <p:ext uri="{521415D9-36F7-43E2-AB2F-B90AF26B5E84}">
       <p14:sectionLst xmlns:p14="http://schemas.microsoft.com/office/powerpoint/2010/main">
-        <p14:section name="도입" id="{8e4bbc7b-913e-06bb-f61e-f79152a7491e}">
+        <p14:section name="도입" id="{9498aed9-f9d3-d4f8-d298-da8f9b33086a}">
           <p14:sldIdLst>
             <p14:sldId id="256"/>
             <p14:sldId id="257"/>
           </p14:sldIdLst>
         </p14:section>
-        <p14:section name="개념" id="{683f841e-474f-6115-329a-19635509c462}">
+        <p14:section name="개념" id="{87818eed-2e56-b153-fabd-cccbad5d75ed}">
           <p14:sldIdLst>
             <p14:sldId id="258"/>
             <p14:sldId id="259"/>
@@ -136,7 +136,7 @@
             <p14:sldId id="265"/>
           </p14:sldIdLst>
         </p14:section>
-        <p14:section name="연습" id="{89267994-7490-8a64-9f6e-b8162f646c46}">
+        <p14:section name="연습" id="{a62f06a5-e8f8-9595-bf09-b93841017dd3}">
           <p14:sldIdLst>
             <p14:sldId id="261"/>
             <p14:sldId id="262"/>
@@ -144,24 +144,24 @@
             <p14:sldId id="266"/>
           </p14:sldIdLst>
         </p14:section>
-        <p14:section name="개념" id="{0ad9676f-8211-3921-c79f-d6c8b961d21c}">
+        <p14:section name="개념" id="{84a86445-4f34-3a10-c5e4-06936ddfa26b}">
           <p14:sldIdLst/>
         </p14:section>
-        <p14:section name="연습" id="{3488ddbd-577f-7f45-9494-7b453aecaae5}">
+        <p14:section name="연습" id="{cd2a2d77-45a9-33f8-859f-c70010074d62}">
           <p14:sldIdLst/>
         </p14:section>
-        <p14:section name="확인" id="{b1be171a-4a55-d522-6e9e-52d88415c13f}">
+        <p14:section name="확인" id="{87214458-2f79-08a4-2140-bd2b41975958}">
           <p14:sldIdLst>
             <p14:sldId id="267"/>
             <p14:sldId id="268"/>
           </p14:sldIdLst>
         </p14:section>
-        <p14:section name="정리" id="{9b6ccc10-2ebe-4507-7b8b-0cbc16945bcf}">
+        <p14:section name="정리" id="{01bc369d-63de-294f-3455-05b3d876436c}">
           <p14:sldIdLst>
             <p14:sldId id="269"/>
           </p14:sldIdLst>
         </p14:section>
-        <p14:section name="보충" id="{d509a204-2da2-36b7-6695-d0f04e265616}">
+        <p14:section name="보충" id="{d5c95a2a-03b8-a8ca-462f-552aa49bfbd1}">
           <p14:sldIdLst>
             <p14:sldId id="270"/>
           </p14:sldIdLst>
@@ -1190,7 +1190,7 @@
 막히면
 - 물건을 직접 들고 써 보게 한 뒤 “이걸 언제, 왜 써?”라고 묻습니다.
 주의
-- 이 차시는 계획상 앞 차시가 없습니다. 보충 뒤에도 어려우면 3학년 ‘생활 도구의 변화’(KR22-G03-SOC-TOOLS-L01)를 먼저 하고 S02부터 다시 시작합니다.
+- 보충 뒤에도 어려우면 3학년 ‘생활 도구의 변화’(KR22-G03-SOC-TOOLS-L01)를 먼저 하고 S02부터 다시 시작합니다.
 - 보충이 오래 걸리면 오늘은 여기까지 하고 다음 날 S02부터 다시 시작합니다.</a:t>
             </a:r>
             <a:endParaRPr lang="en-US" dirty="0"/>
@@ -1292,7 +1292,7 @@
 - ③ 옛 물건(문화유산), 옛 사진, 옛 지도, 어르신 이야기, 책과 기록 가운데 두 가지
 막히면
 - ①은 “할머니가 어릴 때가 먼저야, 엄마가 어릴 때가 먼저야?”라고 둘씩 견주게 합니다.
-- 차례 놓기나 물건으로 생활 짐작하기를 어려워하면 S15(보충)를 먼저 합니다. 이 차시는 계획상 앞 차시가 없습니다(3학년 ‘생활 도구의 변화’, 4학년 ‘지역의 역사’와 가까운 내용입니다).
+- 차례 놓기나 물건으로 생활 짐작하기를 어려워하면 S15(보충)를 먼저 합니다. 앞 차시는 4학년 ‘지역의 역사’이고, 3학년 ‘생활 도구의 변화’와도 이어집니다.
 주의
 - ③에서 ‘옛 물건’이 나오면 “오늘은 그중에서도 아주아주 오래된 물건을 볼 거야.”라고 S03으로 이어 줍니다.</a:t>
             </a:r>

--- a/dist/초5/사회·역사/역사와생활/초5_사회·역사_역사와생활_01_선사시대와고조선.pptx
+++ b/dist/초5/사회·역사/역사와생활/초5_사회·역사_역사와생활_01_선사시대와고조선.pptx
@@ -121,13 +121,13 @@
   <p:extLst>
     <p:ext uri="{521415D9-36F7-43E2-AB2F-B90AF26B5E84}">
       <p14:sectionLst xmlns:p14="http://schemas.microsoft.com/office/powerpoint/2010/main">
-        <p14:section name="도입" id="{9498aed9-f9d3-d4f8-d298-da8f9b33086a}">
+        <p14:section name="도입" id="{43370c1c-090c-dca9-a3c6-b637f836dd1b}">
           <p14:sldIdLst>
             <p14:sldId id="256"/>
             <p14:sldId id="257"/>
           </p14:sldIdLst>
         </p14:section>
-        <p14:section name="개념" id="{87818eed-2e56-b153-fabd-cccbad5d75ed}">
+        <p14:section name="개념" id="{844aec6e-fab5-bc05-2dae-32f64655de9f}">
           <p14:sldIdLst>
             <p14:sldId id="258"/>
             <p14:sldId id="259"/>
@@ -136,7 +136,7 @@
             <p14:sldId id="265"/>
           </p14:sldIdLst>
         </p14:section>
-        <p14:section name="연습" id="{a62f06a5-e8f8-9595-bf09-b93841017dd3}">
+        <p14:section name="연습" id="{252a7d13-e144-b049-66e2-abea84e68c69}">
           <p14:sldIdLst>
             <p14:sldId id="261"/>
             <p14:sldId id="262"/>
@@ -144,24 +144,24 @@
             <p14:sldId id="266"/>
           </p14:sldIdLst>
         </p14:section>
-        <p14:section name="개념" id="{84a86445-4f34-3a10-c5e4-06936ddfa26b}">
+        <p14:section name="개념" id="{9f9e8739-1654-66c6-426a-737262e497f8}">
           <p14:sldIdLst/>
         </p14:section>
-        <p14:section name="연습" id="{cd2a2d77-45a9-33f8-859f-c70010074d62}">
+        <p14:section name="연습" id="{1e7cd052-94f8-304a-bcc3-9308f9223701}">
           <p14:sldIdLst/>
         </p14:section>
-        <p14:section name="확인" id="{87214458-2f79-08a4-2140-bd2b41975958}">
+        <p14:section name="확인" id="{2df60a3a-bc67-6c6f-4d81-a4da3e54ddc4}">
           <p14:sldIdLst>
             <p14:sldId id="267"/>
             <p14:sldId id="268"/>
           </p14:sldIdLst>
         </p14:section>
-        <p14:section name="정리" id="{01bc369d-63de-294f-3455-05b3d876436c}">
+        <p14:section name="정리" id="{a870e107-3f7f-cfc5-2845-f7ee4e78bbba}">
           <p14:sldIdLst>
             <p14:sldId id="269"/>
           </p14:sldIdLst>
         </p14:section>
-        <p14:section name="보충" id="{d5c95a2a-03b8-a8ca-462f-552aa49bfbd1}">
+        <p14:section name="보충" id="{c4129139-5546-5b45-a021-4eaa42857439}">
           <p14:sldIdLst>
             <p14:sldId id="270"/>
           </p14:sldIdLst>
@@ -12012,6 +12012,7 @@
               <a:srgbClr val="1F2937"/>
             </a:solidFill>
             <a:prstDash val="solid"/>
+            <a:tailEnd type="triangle"/>
           </a:ln>
         </p:spPr>
       </p:sp>
@@ -12035,6 +12036,7 @@
               <a:srgbClr val="1F2937"/>
             </a:solidFill>
             <a:prstDash val="solid"/>
+            <a:tailEnd type="triangle"/>
           </a:ln>
         </p:spPr>
       </p:sp>
